--- a/media/resources/files/Onduktardyn_Orunduk_Maanisi_Bingo_JonokoulotuuMN.pptx
+++ b/media/resources/files/Onduktardyn_Orunduk_Maanisi_Bingo_JonokoulotuuMN.pptx
@@ -3760,7 +3760,7 @@
                 <a:ea typeface="+mn-ea"/>
                 <a:cs typeface="+mn-cs"/>
               </a:rPr>
-              <a:t>Окуучулар </a:t>
+              <a:t>Окуучулар тордон тогуз жоопту тандап, дептердеги 3х3 чакмакка каалагандай коюшат.</a:t>
             </a:r>
             <a:r>
               <a:rPr kumimoji="0" lang="ru-RU" sz="2400" b="0" i="0" u="none" strike="noStrike" kern="1200" cap="none" spc="0" normalizeH="0" baseline="0" noProof="0" dirty="0">
@@ -3777,7 +3777,7 @@
                 <a:ea typeface="+mn-ea"/>
                 <a:cs typeface="+mn-cs"/>
               </a:rPr>
-              <a:t>суроо</a:t>
+              <a:t/>
             </a:r>
             <a:r>
               <a:rPr kumimoji="0" lang="en-US" sz="2400" b="0" i="0" u="none" strike="noStrike" kern="1200" cap="none" spc="0" normalizeH="0" baseline="0" noProof="0" dirty="0">
@@ -3794,7 +3794,7 @@
                 <a:ea typeface="+mn-ea"/>
                 <a:cs typeface="+mn-cs"/>
               </a:rPr>
-              <a:t> </a:t>
+              <a:t/>
             </a:r>
             <a:r>
               <a:rPr kumimoji="0" lang="en-US" sz="2400" b="0" i="0" u="none" strike="noStrike" kern="1200" cap="none" spc="0" normalizeH="0" baseline="0" noProof="0" dirty="0" err="1">
@@ -3811,7 +3811,7 @@
                 <a:ea typeface="+mn-ea"/>
                 <a:cs typeface="+mn-cs"/>
               </a:rPr>
-              <a:t>тордон</a:t>
+              <a:t/>
             </a:r>
             <a:r>
               <a:rPr kumimoji="0" lang="en-US" sz="2400" b="0" i="0" u="none" strike="noStrike" kern="1200" cap="none" spc="0" normalizeH="0" baseline="0" noProof="0" dirty="0">
@@ -3828,7 +3828,7 @@
                 <a:ea typeface="+mn-ea"/>
                 <a:cs typeface="+mn-cs"/>
               </a:rPr>
-              <a:t> </a:t>
+              <a:t/>
             </a:r>
             <a:r>
               <a:rPr kumimoji="0" lang="en-US" sz="2000" b="0" i="0" u="none" strike="noStrike" kern="1200" cap="none" spc="0" normalizeH="0" baseline="0" noProof="0" dirty="0" err="1">
@@ -3845,7 +3845,7 @@
                 <a:ea typeface="+mn-ea"/>
                 <a:cs typeface="+mn-cs"/>
               </a:rPr>
-              <a:t>тогуз</a:t>
+              <a:t/>
             </a:r>
             <a:r>
               <a:rPr kumimoji="0" lang="en-US" sz="2000" b="0" i="0" u="none" strike="noStrike" kern="1200" cap="none" spc="0" normalizeH="0" baseline="0" noProof="0" dirty="0">
@@ -3862,7 +3862,7 @@
                 <a:ea typeface="+mn-ea"/>
                 <a:cs typeface="+mn-cs"/>
               </a:rPr>
-              <a:t> </a:t>
+              <a:t/>
             </a:r>
             <a:r>
               <a:rPr kumimoji="0" lang="en-US" sz="2000" b="0" i="0" u="none" strike="noStrike" kern="1200" cap="none" spc="0" normalizeH="0" baseline="0" noProof="0" dirty="0" err="1">
@@ -3879,7 +3879,7 @@
                 <a:ea typeface="+mn-ea"/>
                 <a:cs typeface="+mn-cs"/>
               </a:rPr>
-              <a:t>жоопту</a:t>
+              <a:t/>
             </a:r>
             <a:r>
               <a:rPr kumimoji="0" lang="en-US" sz="2000" b="0" i="0" u="none" strike="noStrike" kern="1200" cap="none" spc="0" normalizeH="0" baseline="0" noProof="0" dirty="0">
@@ -3896,7 +3896,7 @@
                 <a:ea typeface="+mn-ea"/>
                 <a:cs typeface="+mn-cs"/>
               </a:rPr>
-              <a:t> </a:t>
+              <a:t/>
             </a:r>
             <a:r>
               <a:rPr kumimoji="0" lang="en-US" sz="2000" b="0" i="0" u="none" strike="noStrike" kern="1200" cap="none" spc="0" normalizeH="0" baseline="0" noProof="0" dirty="0" err="1">
@@ -3913,7 +3913,7 @@
                 <a:ea typeface="+mn-ea"/>
                 <a:cs typeface="+mn-cs"/>
               </a:rPr>
-              <a:t>тандап</a:t>
+              <a:t/>
             </a:r>
             <a:r>
               <a:rPr kumimoji="0" lang="en-US" sz="2000" b="0" i="0" u="none" strike="noStrike" kern="1200" cap="none" spc="0" normalizeH="0" baseline="0" noProof="0" dirty="0">
@@ -3930,7 +3930,7 @@
                 <a:ea typeface="+mn-ea"/>
                 <a:cs typeface="+mn-cs"/>
               </a:rPr>
-              <a:t>, </a:t>
+              <a:t/>
             </a:r>
             <a:r>
               <a:rPr kumimoji="0" lang="en-US" sz="2000" b="0" i="0" u="none" strike="noStrike" kern="1200" cap="none" spc="0" normalizeH="0" baseline="0" noProof="0" dirty="0" err="1">
@@ -3947,7 +3947,7 @@
                 <a:ea typeface="+mn-ea"/>
                 <a:cs typeface="+mn-cs"/>
               </a:rPr>
-              <a:t>аларды</a:t>
+              <a:t/>
             </a:r>
             <a:r>
               <a:rPr kumimoji="0" lang="en-US" sz="2000" b="0" i="0" u="none" strike="noStrike" kern="1200" cap="none" spc="0" normalizeH="0" baseline="0" noProof="0" dirty="0">
@@ -3964,7 +3964,7 @@
                 <a:ea typeface="+mn-ea"/>
                 <a:cs typeface="+mn-cs"/>
               </a:rPr>
-              <a:t> </a:t>
+              <a:t/>
             </a:r>
             <a:r>
               <a:rPr kumimoji="0" lang="ru-RU" sz="2000" b="0" i="0" u="none" strike="noStrike" kern="1200" cap="none" spc="0" normalizeH="0" baseline="0" noProof="0" dirty="0">
@@ -3981,7 +3981,7 @@
                 <a:ea typeface="+mn-ea"/>
                 <a:cs typeface="+mn-cs"/>
               </a:rPr>
-              <a:t>дептериндеги</a:t>
+              <a:t/>
             </a:r>
             <a:r>
               <a:rPr kumimoji="0" lang="en-US" sz="2000" b="0" i="0" u="none" strike="noStrike" kern="1200" cap="none" spc="0" normalizeH="0" baseline="0" noProof="0" dirty="0">
@@ -3998,7 +3998,7 @@
                 <a:ea typeface="+mn-ea"/>
                 <a:cs typeface="+mn-cs"/>
               </a:rPr>
-              <a:t> 3х3 </a:t>
+              <a:t/>
             </a:r>
             <a:r>
               <a:rPr kumimoji="0" lang="en-US" sz="2000" b="0" i="0" u="none" strike="noStrike" kern="1200" cap="none" spc="0" normalizeH="0" baseline="0" noProof="0" dirty="0" err="1">
@@ -4015,7 +4015,7 @@
                 <a:ea typeface="+mn-ea"/>
                 <a:cs typeface="+mn-cs"/>
               </a:rPr>
-              <a:t>квадратка</a:t>
+              <a:t/>
             </a:r>
             <a:r>
               <a:rPr kumimoji="0" lang="en-US" sz="2000" b="0" i="0" u="none" strike="noStrike" kern="1200" cap="none" spc="0" normalizeH="0" baseline="0" noProof="0" dirty="0">
@@ -4032,7 +4032,7 @@
                 <a:ea typeface="+mn-ea"/>
                 <a:cs typeface="+mn-cs"/>
               </a:rPr>
-              <a:t> </a:t>
+              <a:t/>
             </a:r>
             <a:r>
               <a:rPr kumimoji="0" lang="en-US" sz="2000" b="0" i="0" u="none" strike="noStrike" kern="1200" cap="none" spc="0" normalizeH="0" baseline="0" noProof="0" dirty="0" err="1">
@@ -4049,7 +4049,7 @@
                 <a:ea typeface="+mn-ea"/>
                 <a:cs typeface="+mn-cs"/>
               </a:rPr>
-              <a:t>туш</a:t>
+              <a:t/>
             </a:r>
             <a:r>
               <a:rPr kumimoji="0" lang="en-US" sz="2000" b="0" i="0" u="none" strike="noStrike" kern="1200" cap="none" spc="0" normalizeH="0" baseline="0" noProof="0" dirty="0">
@@ -4066,7 +4066,7 @@
                 <a:ea typeface="+mn-ea"/>
                 <a:cs typeface="+mn-cs"/>
               </a:rPr>
-              <a:t> </a:t>
+              <a:t/>
             </a:r>
             <a:r>
               <a:rPr kumimoji="0" lang="en-US" sz="2000" b="0" i="0" u="none" strike="noStrike" kern="1200" cap="none" spc="0" normalizeH="0" baseline="0" noProof="0" dirty="0" err="1">
@@ -4083,7 +4083,7 @@
                 <a:ea typeface="+mn-ea"/>
                 <a:cs typeface="+mn-cs"/>
               </a:rPr>
-              <a:t>келди</a:t>
+              <a:t/>
             </a:r>
             <a:r>
               <a:rPr kumimoji="0" lang="en-US" sz="2000" b="0" i="0" u="none" strike="noStrike" kern="1200" cap="none" spc="0" normalizeH="0" baseline="0" noProof="0" dirty="0">
@@ -4100,7 +4100,7 @@
                 <a:ea typeface="+mn-ea"/>
                 <a:cs typeface="+mn-cs"/>
               </a:rPr>
-              <a:t> </a:t>
+              <a:t/>
             </a:r>
             <a:r>
               <a:rPr kumimoji="0" lang="en-US" sz="2000" b="0" i="0" u="none" strike="noStrike" kern="1200" cap="none" spc="0" normalizeH="0" baseline="0" noProof="0" dirty="0" err="1">
@@ -4117,7 +4117,7 @@
                 <a:ea typeface="+mn-ea"/>
                 <a:cs typeface="+mn-cs"/>
               </a:rPr>
-              <a:t>жайгаштырышы</a:t>
+              <a:t/>
             </a:r>
             <a:r>
               <a:rPr kumimoji="0" lang="en-US" sz="2000" b="0" i="0" u="none" strike="noStrike" kern="1200" cap="none" spc="0" normalizeH="0" baseline="0" noProof="0" dirty="0">
@@ -4134,7 +4134,7 @@
                 <a:ea typeface="+mn-ea"/>
                 <a:cs typeface="+mn-cs"/>
               </a:rPr>
-              <a:t> </a:t>
+              <a:t/>
             </a:r>
             <a:r>
               <a:rPr kumimoji="0" lang="en-US" sz="2000" b="0" i="0" u="none" strike="noStrike" kern="1200" cap="none" spc="0" normalizeH="0" baseline="0" noProof="0" dirty="0" err="1">
@@ -4151,7 +4151,7 @@
                 <a:ea typeface="+mn-ea"/>
                 <a:cs typeface="+mn-cs"/>
               </a:rPr>
-              <a:t>керек</a:t>
+              <a:t/>
             </a:r>
             <a:r>
               <a:rPr kumimoji="0" lang="en-US" sz="2000" b="0" i="0" u="none" strike="noStrike" kern="1200" cap="none" spc="0" normalizeH="0" baseline="0" noProof="0" dirty="0">
@@ -4168,7 +4168,7 @@
                 <a:ea typeface="+mn-ea"/>
                 <a:cs typeface="+mn-cs"/>
               </a:rPr>
-              <a:t>.</a:t>
+              <a:t/>
             </a:r>
           </a:p>
           <a:p>
@@ -5368,7 +5368,7 @@
             <a:pPr algn="ctr"/>
             <a:r>
               <a:rPr lang="en-GB" sz="11500" spc="800" dirty="0"/>
-              <a:t>8.132</a:t>
+              <a:t>8,132</a:t>
             </a:r>
           </a:p>
         </p:txBody>
@@ -5826,7 +5826,7 @@
             <a:pPr algn="ctr"/>
             <a:r>
               <a:rPr lang="en-GB" sz="11500" spc="800" dirty="0"/>
-              <a:t>5.461</a:t>
+              <a:t>5,461</a:t>
             </a:r>
           </a:p>
         </p:txBody>
@@ -6284,7 +6284,7 @@
             <a:pPr algn="ctr"/>
             <a:r>
               <a:rPr lang="en-GB" sz="11500" spc="800" dirty="0"/>
-              <a:t>1.897</a:t>
+              <a:t>1,897</a:t>
             </a:r>
           </a:p>
         </p:txBody>
@@ -6742,7 +6742,7 @@
             <a:pPr algn="ctr"/>
             <a:r>
               <a:rPr lang="en-GB" sz="11500" spc="800" dirty="0"/>
-              <a:t>1.245</a:t>
+              <a:t>1,245</a:t>
             </a:r>
           </a:p>
         </p:txBody>
@@ -7200,7 +7200,7 @@
             <a:pPr algn="ctr"/>
             <a:r>
               <a:rPr lang="en-GB" sz="11500" spc="800" dirty="0"/>
-              <a:t>3.726</a:t>
+              <a:t>3,726</a:t>
             </a:r>
           </a:p>
         </p:txBody>
@@ -7658,7 +7658,7 @@
             <a:pPr algn="ctr"/>
             <a:r>
               <a:rPr lang="en-GB" sz="11500" spc="800" dirty="0"/>
-              <a:t>4.221</a:t>
+              <a:t>4,221</a:t>
             </a:r>
           </a:p>
         </p:txBody>
@@ -8116,7 +8116,7 @@
             <a:pPr algn="ctr"/>
             <a:r>
               <a:rPr lang="en-GB" sz="11500" spc="800" dirty="0"/>
-              <a:t>7.214</a:t>
+              <a:t>7,214</a:t>
             </a:r>
           </a:p>
         </p:txBody>
@@ -8574,7 +8574,7 @@
             <a:pPr algn="ctr"/>
             <a:r>
               <a:rPr lang="en-GB" sz="11500" spc="800" dirty="0"/>
-              <a:t>8.124</a:t>
+              <a:t>8,124</a:t>
             </a:r>
           </a:p>
         </p:txBody>
@@ -9032,7 +9032,7 @@
             <a:pPr algn="ctr"/>
             <a:r>
               <a:rPr lang="en-GB" sz="11500" spc="800" dirty="0"/>
-              <a:t>3.384</a:t>
+              <a:t>3,384</a:t>
             </a:r>
           </a:p>
         </p:txBody>
@@ -9490,7 +9490,7 @@
             <a:pPr algn="ctr"/>
             <a:r>
               <a:rPr lang="en-GB" sz="11500" spc="800" dirty="0"/>
-              <a:t>6.354</a:t>
+              <a:t>6,354</a:t>
             </a:r>
           </a:p>
         </p:txBody>
@@ -24160,7 +24160,7 @@
             <a:pPr algn="ctr"/>
             <a:r>
               <a:rPr lang="en-GB" sz="11500" spc="800" dirty="0"/>
-              <a:t>6.681</a:t>
+              <a:t>6,681</a:t>
             </a:r>
           </a:p>
         </p:txBody>
@@ -24618,7 +24618,7 @@
             <a:pPr algn="ctr"/>
             <a:r>
               <a:rPr lang="en-GB" sz="11500" spc="800" dirty="0"/>
-              <a:t>4.519</a:t>
+              <a:t>4,519</a:t>
             </a:r>
           </a:p>
         </p:txBody>
@@ -25076,7 +25076,7 @@
             <a:pPr algn="ctr"/>
             <a:r>
               <a:rPr lang="en-GB" sz="11500" spc="800" dirty="0"/>
-              <a:t>3.029</a:t>
+              <a:t>3,029</a:t>
             </a:r>
           </a:p>
         </p:txBody>
@@ -25534,7 +25534,7 @@
             <a:pPr algn="ctr"/>
             <a:r>
               <a:rPr lang="en-GB" sz="11500" spc="800" dirty="0"/>
-              <a:t>0.423</a:t>
+              <a:t>0,423</a:t>
             </a:r>
           </a:p>
         </p:txBody>
@@ -25992,7 +25992,7 @@
             <a:pPr algn="ctr"/>
             <a:r>
               <a:rPr lang="en-GB" sz="11500" spc="800" dirty="0"/>
-              <a:t>2.577</a:t>
+              <a:t>2,577</a:t>
             </a:r>
           </a:p>
         </p:txBody>
@@ -26450,7 +26450,7 @@
             <a:pPr algn="ctr"/>
             <a:r>
               <a:rPr lang="en-GB" sz="11500" spc="800" dirty="0"/>
-              <a:t>0.464</a:t>
+              <a:t>0,464</a:t>
             </a:r>
           </a:p>
         </p:txBody>
